--- a/praesentationen/input-06-azure-networking.pptx
+++ b/praesentationen/input-06-azure-networking.pptx
@@ -120,7 +120,7 @@
   <p:extLst>
     <p:ext uri="{521415D9-36F7-43E2-AB2F-B90AF26B5E84}">
       <p14:sectionLst xmlns:p14="http://schemas.microsoft.com/office/powerpoint/2010/main">
-        <p14:section name="VNet" id="{6ac22df2-85a7-0706-4953-1f9322806705}">
+        <p14:section name="VNet" id="{13031f18-d7e4-52ce-414d-ebcdc4ac0ca0}">
           <p14:sldIdLst>
             <p14:sldId id="256"/>
             <p14:sldId id="257"/>
@@ -129,7 +129,7 @@
             <p14:sldId id="260"/>
           </p14:sldIdLst>
         </p14:section>
-        <p14:section name="NSG" id="{663741de-4042-dd7b-e7ba-f969745112d6}">
+        <p14:section name="NSG" id="{510385fd-0d97-3d30-b146-8cc9eb490745}">
           <p14:sldIdLst>
             <p14:sldId id="261"/>
             <p14:sldId id="262"/>

--- a/praesentationen/input-06-azure-networking.pptx
+++ b/praesentationen/input-06-azure-networking.pptx
@@ -120,7 +120,7 @@
   <p:extLst>
     <p:ext uri="{521415D9-36F7-43E2-AB2F-B90AF26B5E84}">
       <p14:sectionLst xmlns:p14="http://schemas.microsoft.com/office/powerpoint/2010/main">
-        <p14:section name="VNet" id="{13031f18-d7e4-52ce-414d-ebcdc4ac0ca0}">
+        <p14:section name="VNet" id="{2badc653-eebb-21db-f926-374edccb4011}">
           <p14:sldIdLst>
             <p14:sldId id="256"/>
             <p14:sldId id="257"/>
@@ -129,7 +129,7 @@
             <p14:sldId id="260"/>
           </p14:sldIdLst>
         </p14:section>
-        <p14:section name="NSG" id="{510385fd-0d97-3d30-b146-8cc9eb490745}">
+        <p14:section name="NSG" id="{e217c803-8d65-1e58-3b3d-e5f7bd84e71a}">
           <p14:sldIdLst>
             <p14:sldId id="261"/>
             <p14:sldId id="262"/>
@@ -4708,7 +4708,7 @@
                   <a:srgbClr val="27303A"/>
                 </a:solidFill>
               </a:rPr>
-              <a:t>VNet, Adressraum, Subnetz</a:t>
+              <a:t>Virtuelles Netzwerk, Adressraum, Subnetz</a:t>
             </a:r>
             <a:endParaRPr lang="en-US" sz="3400" dirty="0"/>
           </a:p>
@@ -4822,7 +4822,7 @@
                   <a:srgbClr val="27303A"/>
                 </a:solidFill>
               </a:rPr>
-              <a:t>VNet</a:t>
+              <a:t>Virtuelles Netzwerk (VNet)</a:t>
             </a:r>
             <a:endParaRPr lang="en-US" sz="2000" dirty="0"/>
           </a:p>
@@ -4861,7 +4861,7 @@
                   <a:srgbClr val="27303A"/>
                 </a:solidFill>
               </a:rPr>
-              <a:t>Dein eigenes, isoliertes Netz in Azure – ein Firmengelände mit Zaun. Liegt in einer Region.</a:t>
+              <a:t>(Virtual Network) Dein eigenes, isoliertes Netz in Azure – ein Firmengelände mit Zaun. Liegt in einer Region.</a:t>
             </a:r>
             <a:endParaRPr lang="en-US" sz="1600" dirty="0"/>
           </a:p>
@@ -5014,7 +5014,7 @@
                   <a:srgbClr val="27303A"/>
                 </a:solidFill>
               </a:rPr>
-              <a:t>IP-Bereich des VNets, z. B. 10.10.0.0/16. Nur private Bereiche verwenden.</a:t>
+              <a:t>(Address Space) IP-Bereich des VNets, z. B. 10.10.0.0/16. Nur private Bereiche verwenden.</a:t>
             </a:r>
             <a:endParaRPr lang="en-US" sz="1600" dirty="0"/>
           </a:p>
@@ -5167,7 +5167,7 @@
                   <a:srgbClr val="27303A"/>
                 </a:solidFill>
               </a:rPr>
-              <a:t>Teil des VNets, z. B. 10.10.1.0/24 – ein Gebäude auf dem Gelände. Jede NIC hängt in genau einem.</a:t>
+              <a:t>(Subnet) Teil des VNets, z. B. 10.10.1.0/24 – ein Gebäude auf dem Gelände. Jede NIC hängt in genau einem.</a:t>
             </a:r>
             <a:endParaRPr lang="en-US" sz="1600" dirty="0"/>
           </a:p>
@@ -7642,7 +7642,7 @@
                   <a:srgbClr val="27303A"/>
                 </a:solidFill>
               </a:rPr>
-              <a:t>Öffentliche IP</a:t>
+              <a:t>Öffentliche IP (Public IP)</a:t>
             </a:r>
             <a:endParaRPr lang="en-US" sz="2200" dirty="0"/>
           </a:p>
@@ -7862,7 +7862,7 @@
                   <a:srgbClr val="FFFFFF"/>
                 </a:solidFill>
               </a:rPr>
-              <a:t>Network Security Groups</a:t>
+              <a:t>Netzwerksicherheitsgruppen</a:t>
             </a:r>
             <a:endParaRPr lang="en-US" sz="4000" dirty="0"/>
           </a:p>
@@ -7900,7 +7900,7 @@
                   <a:srgbClr val="DEE2FB"/>
                 </a:solidFill>
               </a:rPr>
-              <a:t>Input 2 · Tag 4</a:t>
+              <a:t>Network Security Groups (NSG) · Input 2 · Tag 4</a:t>
             </a:r>
             <a:endParaRPr lang="en-US" sz="2000" dirty="0"/>
           </a:p>

--- a/praesentationen/input-06-azure-networking.pptx
+++ b/praesentationen/input-06-azure-networking.pptx
@@ -120,7 +120,7 @@
   <p:extLst>
     <p:ext uri="{521415D9-36F7-43E2-AB2F-B90AF26B5E84}">
       <p14:sectionLst xmlns:p14="http://schemas.microsoft.com/office/powerpoint/2010/main">
-        <p14:section name="VNet" id="{2badc653-eebb-21db-f926-374edccb4011}">
+        <p14:section name="VNet" id="{ccb7bb60-7016-e9b7-56f3-6569856d5242}">
           <p14:sldIdLst>
             <p14:sldId id="256"/>
             <p14:sldId id="257"/>
@@ -129,7 +129,7 @@
             <p14:sldId id="260"/>
           </p14:sldIdLst>
         </p14:section>
-        <p14:section name="NSG" id="{e217c803-8d65-1e58-3b3d-e5f7bd84e71a}">
+        <p14:section name="NSG" id="{a486cb93-ff9a-ea2a-9f76-2c1494673294}">
           <p14:sldIdLst>
             <p14:sldId id="261"/>
             <p14:sldId id="262"/>
@@ -1768,7 +1768,7 @@
     <p:bg>
       <p:bgPr>
         <a:solidFill>
-          <a:srgbClr val="27303A"/>
+          <a:srgbClr val="FFFFFF"/>
         </a:solidFill>
       </p:bgPr>
     </p:bg>
@@ -1788,7 +1788,7 @@
       </p:grpSpPr>
       <p:pic>
         <p:nvPicPr>
-          <p:cNvPr id="2" name="Image 0" descr="C:\Users\Thanam\AppData\Local\Temp\claude\c--Projekt-Trainings-azure-basics-training\a9e0bf4e-0d08-4082-a38a-5b8886538508\scratchpad\pptx\assets\logo-hell.png">    </p:cNvPr>
+          <p:cNvPr id="2" name="Image 0" descr="C:\Users\Thanam\AppData\Local\Temp\claude\c--Projekt-Trainings-azure-basics-training\a7a6b8eb-22f3-4b42-aecc-5af05d1502b1\scratchpad\folien\assets\logo-dunkel.png">    </p:cNvPr>
           <p:cNvPicPr>
             <a:picLocks noChangeAspect="1"/>
           </p:cNvPicPr>
@@ -1812,7 +1812,7 @@
       </p:pic>
       <p:pic>
         <p:nvPicPr>
-          <p:cNvPr id="3" name="Image 1" descr="C:\Users\Thanam\AppData\Local\Temp\claude\c--Projekt-Trainings-azure-basics-training\a9e0bf4e-0d08-4082-a38a-5b8886538508\scratchpad\pptx\assets\wolke.png">    </p:cNvPr>
+          <p:cNvPr id="3" name="Image 1" descr="C:\Users\Thanam\AppData\Local\Temp\claude\c--Projekt-Trainings-azure-basics-training\a7a6b8eb-22f3-4b42-aecc-5af05d1502b1\scratchpad\folien\assets\wolke.png">    </p:cNvPr>
           <p:cNvPicPr>
             <a:picLocks noChangeAspect="1"/>
           </p:cNvPicPr>
@@ -1860,7 +1860,7 @@
               <a:buNone/>
               <a:defRPr lang="en-US" sz="4400" b="1" dirty="0">
                 <a:solidFill>
-                  <a:srgbClr val="FFFFFF"/>
+                  <a:srgbClr val="27303A"/>
                 </a:solidFill>
               </a:defRPr>
             </a:lvl1pPr>
@@ -1899,7 +1899,7 @@
               <a:buNone/>
               <a:defRPr lang="en-US" sz="2000" dirty="0">
                 <a:solidFill>
-                  <a:srgbClr val="DEE2FB"/>
+                  <a:srgbClr val="006FAD"/>
                 </a:solidFill>
               </a:defRPr>
             </a:lvl1pPr>
@@ -1939,7 +1939,7 @@
             <a:r>
               <a:rPr lang="en-US" sz="1200" dirty="0">
                 <a:solidFill>
-                  <a:srgbClr val="DEE2FB"/>
+                  <a:srgbClr val="6F6F6F"/>
                 </a:solidFill>
               </a:rPr>
               <a:t>Kanton Zürich · ICT-Grundbildung · PAT Cloud Solutions</a:t>
@@ -1962,7 +1962,7 @@
     <p:bg>
       <p:bgPr>
         <a:solidFill>
-          <a:srgbClr val="006FAD"/>
+          <a:srgbClr val="F7F7F7"/>
         </a:solidFill>
       </p:bgPr>
     </p:bg>
@@ -1982,7 +1982,7 @@
       </p:grpSpPr>
       <p:pic>
         <p:nvPicPr>
-          <p:cNvPr id="2" name="Image 0" descr="C:\Users\Thanam\AppData\Local\Temp\claude\c--Projekt-Trainings-azure-basics-training\a9e0bf4e-0d08-4082-a38a-5b8886538508\scratchpad\pptx\assets\wolke.png">    </p:cNvPr>
+          <p:cNvPr id="2" name="Image 0" descr="C:\Users\Thanam\AppData\Local\Temp\claude\c--Projekt-Trainings-azure-basics-training\a7a6b8eb-22f3-4b42-aecc-5af05d1502b1\scratchpad\folien\assets\wolke.png">    </p:cNvPr>
           <p:cNvPicPr>
             <a:picLocks noChangeAspect="1"/>
           </p:cNvPicPr>
@@ -2006,7 +2006,7 @@
       </p:pic>
       <p:pic>
         <p:nvPicPr>
-          <p:cNvPr id="3" name="Image 1" descr="C:\Users\Thanam\AppData\Local\Temp\claude\c--Projekt-Trainings-azure-basics-training\a9e0bf4e-0d08-4082-a38a-5b8886538508\scratchpad\pptx\assets\logo-hell.png">    </p:cNvPr>
+          <p:cNvPr id="3" name="Image 1" descr="C:\Users\Thanam\AppData\Local\Temp\claude\c--Projekt-Trainings-azure-basics-training\a7a6b8eb-22f3-4b42-aecc-5af05d1502b1\scratchpad\folien\assets\logo-dunkel.png">    </p:cNvPr>
           <p:cNvPicPr>
             <a:picLocks noChangeAspect="1"/>
           </p:cNvPicPr>
@@ -2054,7 +2054,7 @@
               <a:buNone/>
               <a:defRPr lang="en-US" sz="4000" b="1" dirty="0">
                 <a:solidFill>
-                  <a:srgbClr val="FFFFFF"/>
+                  <a:srgbClr val="27303A"/>
                 </a:solidFill>
               </a:defRPr>
             </a:lvl1pPr>
@@ -2093,7 +2093,7 @@
               <a:buNone/>
               <a:defRPr lang="en-US" sz="2000" dirty="0">
                 <a:solidFill>
-                  <a:srgbClr val="DEE2FB"/>
+                  <a:srgbClr val="006FAD"/>
                 </a:solidFill>
               </a:defRPr>
             </a:lvl1pPr>
@@ -2140,7 +2140,7 @@
       </p:grpSpPr>
       <p:pic>
         <p:nvPicPr>
-          <p:cNvPr id="2" name="Image 0" descr="C:\Users\Thanam\AppData\Local\Temp\claude\c--Projekt-Trainings-azure-basics-training\a9e0bf4e-0d08-4082-a38a-5b8886538508\scratchpad\pptx\assets\logo-dunkel.png">    </p:cNvPr>
+          <p:cNvPr id="2" name="Image 0" descr="C:\Users\Thanam\AppData\Local\Temp\claude\c--Projekt-Trainings-azure-basics-training\a7a6b8eb-22f3-4b42-aecc-5af05d1502b1\scratchpad\folien\assets\logo-dunkel.png">    </p:cNvPr>
           <p:cNvPicPr>
             <a:picLocks noChangeAspect="1"/>
           </p:cNvPicPr>
@@ -2296,7 +2296,7 @@
     <p:bg>
       <p:bgPr>
         <a:solidFill>
-          <a:srgbClr val="27303A"/>
+          <a:srgbClr val="FFFFFF"/>
         </a:solidFill>
       </p:bgPr>
     </p:bg>
@@ -2316,7 +2316,7 @@
       </p:grpSpPr>
       <p:pic>
         <p:nvPicPr>
-          <p:cNvPr id="2" name="Image 0" descr="C:\Users\Thanam\AppData\Local\Temp\claude\c--Projekt-Trainings-azure-basics-training\a9e0bf4e-0d08-4082-a38a-5b8886538508\scratchpad\pptx\assets\logo-hell.png">    </p:cNvPr>
+          <p:cNvPr id="2" name="Image 0" descr="C:\Users\Thanam\AppData\Local\Temp\claude\c--Projekt-Trainings-azure-basics-training\a7a6b8eb-22f3-4b42-aecc-5af05d1502b1\scratchpad\folien\assets\logo-dunkel.png">    </p:cNvPr>
           <p:cNvPicPr>
             <a:picLocks noChangeAspect="1"/>
           </p:cNvPicPr>
@@ -2364,7 +2364,7 @@
               <a:buNone/>
               <a:defRPr lang="en-US" sz="4000" b="1" dirty="0">
                 <a:solidFill>
-                  <a:srgbClr val="FFFFFF"/>
+                  <a:srgbClr val="27303A"/>
                 </a:solidFill>
               </a:defRPr>
             </a:lvl1pPr>
@@ -2403,7 +2403,7 @@
               <a:buNone/>
               <a:defRPr lang="en-US" sz="2000" dirty="0">
                 <a:solidFill>
-                  <a:srgbClr val="DEE2FB"/>
+                  <a:srgbClr val="006FAD"/>
                 </a:solidFill>
               </a:defRPr>
             </a:lvl1pPr>
@@ -2796,7 +2796,7 @@
             <a:r>
               <a:rPr lang="en-US" sz="4400" b="1" dirty="0">
                 <a:solidFill>
-                  <a:srgbClr val="FFFFFF"/>
+                  <a:srgbClr val="27303A"/>
                 </a:solidFill>
               </a:rPr>
               <a:t>Azure Networking</a:t>
@@ -2834,7 +2834,7 @@
             <a:r>
               <a:rPr lang="en-US" sz="2000" dirty="0">
                 <a:solidFill>
-                  <a:srgbClr val="DEE2FB"/>
+                  <a:srgbClr val="006FAD"/>
                 </a:solidFill>
               </a:rPr>
               <a:t>Input 1 und 2 · Tag 4</a:t>
@@ -2960,7 +2960,7 @@
       </p:sp>
       <p:pic>
         <p:nvPicPr>
-          <p:cNvPr id="5" name="icon-FaExchangeAlt" descr="C:\Users\Thanam\AppData\Local\Temp\claude\c--Projekt-Trainings-azure-basics-training\a9e0bf4e-0d08-4082-a38a-5b8886538508\scratchpad\pptx\assets\icons\FaExchangeAlt.png">    </p:cNvPr>
+          <p:cNvPr id="5" name="icon-FaExchangeAlt" descr="C:\Users\Thanam\AppData\Local\Temp\claude\c--Projekt-Trainings-azure-basics-training\a7a6b8eb-22f3-4b42-aecc-5af05d1502b1\scratchpad\folien\assets\icons\FaExchangeAlt.png">    </p:cNvPr>
           <p:cNvPicPr>
             <a:picLocks noChangeAspect="1"/>
           </p:cNvPicPr>
@@ -3113,7 +3113,7 @@
       </p:sp>
       <p:pic>
         <p:nvPicPr>
-          <p:cNvPr id="10" name="icon-FaUserShield" descr="C:\Users\Thanam\AppData\Local\Temp\claude\c--Projekt-Trainings-azure-basics-training\a9e0bf4e-0d08-4082-a38a-5b8886538508\scratchpad\pptx\assets\icons\FaUserShield.png">    </p:cNvPr>
+          <p:cNvPr id="10" name="icon-FaUserShield" descr="C:\Users\Thanam\AppData\Local\Temp\claude\c--Projekt-Trainings-azure-basics-training\a7a6b8eb-22f3-4b42-aecc-5af05d1502b1\scratchpad\folien\assets\icons\FaUserShield.png">    </p:cNvPr>
           <p:cNvPicPr>
             <a:picLocks noChangeAspect="1"/>
           </p:cNvPicPr>
@@ -3266,7 +3266,7 @@
       </p:sp>
       <p:pic>
         <p:nvPicPr>
-          <p:cNvPr id="15" name="icon-FaPlug" descr="C:\Users\Thanam\AppData\Local\Temp\claude\c--Projekt-Trainings-azure-basics-training\a9e0bf4e-0d08-4082-a38a-5b8886538508\scratchpad\pptx\assets\icons\FaPlug.png">    </p:cNvPr>
+          <p:cNvPr id="15" name="icon-FaPlug" descr="C:\Users\Thanam\AppData\Local\Temp\claude\c--Projekt-Trainings-azure-basics-training\a7a6b8eb-22f3-4b42-aecc-5af05d1502b1\scratchpad\folien\assets\icons\FaPlug.png">    </p:cNvPr>
           <p:cNvPicPr>
             <a:picLocks noChangeAspect="1"/>
           </p:cNvPicPr>
@@ -3695,7 +3695,7 @@
       </p:sp>
       <p:pic>
         <p:nvPicPr>
-          <p:cNvPr id="6" name="icon-FaQuestionCircle" descr="C:\Users\Thanam\AppData\Local\Temp\claude\c--Projekt-Trainings-azure-basics-training\a9e0bf4e-0d08-4082-a38a-5b8886538508\scratchpad\pptx\assets\icons\FaQuestionCircle.png">    </p:cNvPr>
+          <p:cNvPr id="6" name="icon-FaQuestionCircle" descr="C:\Users\Thanam\AppData\Local\Temp\claude\c--Projekt-Trainings-azure-basics-training\a7a6b8eb-22f3-4b42-aecc-5af05d1502b1\scratchpad\folien\assets\icons\FaQuestionCircle.png">    </p:cNvPr>
           <p:cNvPicPr>
             <a:picLocks noChangeAspect="1"/>
           </p:cNvPicPr>
@@ -3848,7 +3848,7 @@
       </p:sp>
       <p:pic>
         <p:nvPicPr>
-          <p:cNvPr id="11" name="icon-FaQuestionCircle" descr="C:\Users\Thanam\AppData\Local\Temp\claude\c--Projekt-Trainings-azure-basics-training\a9e0bf4e-0d08-4082-a38a-5b8886538508\scratchpad\pptx\assets\icons\FaQuestionCircle.png">    </p:cNvPr>
+          <p:cNvPr id="11" name="icon-FaQuestionCircle" descr="C:\Users\Thanam\AppData\Local\Temp\claude\c--Projekt-Trainings-azure-basics-training\a7a6b8eb-22f3-4b42-aecc-5af05d1502b1\scratchpad\folien\assets\icons\FaQuestionCircle.png">    </p:cNvPr>
           <p:cNvPicPr>
             <a:picLocks noChangeAspect="1"/>
           </p:cNvPicPr>
@@ -4001,7 +4001,7 @@
       </p:sp>
       <p:pic>
         <p:nvPicPr>
-          <p:cNvPr id="16" name="icon-FaQuestionCircle" descr="C:\Users\Thanam\AppData\Local\Temp\claude\c--Projekt-Trainings-azure-basics-training\a9e0bf4e-0d08-4082-a38a-5b8886538508\scratchpad\pptx\assets\icons\FaQuestionCircle.png">    </p:cNvPr>
+          <p:cNvPr id="16" name="icon-FaQuestionCircle" descr="C:\Users\Thanam\AppData\Local\Temp\claude\c--Projekt-Trainings-azure-basics-training\a7a6b8eb-22f3-4b42-aecc-5af05d1502b1\scratchpad\folien\assets\icons\FaQuestionCircle.png">    </p:cNvPr>
           <p:cNvPicPr>
             <a:picLocks noChangeAspect="1"/>
           </p:cNvPicPr>
@@ -4235,7 +4235,7 @@
       </p:sp>
       <p:pic>
         <p:nvPicPr>
-          <p:cNvPr id="4" name="icon-FaBook" descr="C:\Users\Thanam\AppData\Local\Temp\claude\c--Projekt-Trainings-azure-basics-training\a9e0bf4e-0d08-4082-a38a-5b8886538508\scratchpad\pptx\assets\icons\FaBook.png">    </p:cNvPr>
+          <p:cNvPr id="4" name="icon-FaBook" descr="C:\Users\Thanam\AppData\Local\Temp\claude\c--Projekt-Trainings-azure-basics-training\a7a6b8eb-22f3-4b42-aecc-5af05d1502b1\scratchpad\folien\assets\icons\FaBook.png">    </p:cNvPr>
           <p:cNvPicPr>
             <a:picLocks noChangeAspect="1"/>
           </p:cNvPicPr>
@@ -4334,7 +4334,7 @@
       </p:sp>
       <p:pic>
         <p:nvPicPr>
-          <p:cNvPr id="7" name="icon-FaGraduationCap" descr="C:\Users\Thanam\AppData\Local\Temp\claude\c--Projekt-Trainings-azure-basics-training\a9e0bf4e-0d08-4082-a38a-5b8886538508\scratchpad\pptx\assets\icons\FaGraduationCap.png">    </p:cNvPr>
+          <p:cNvPr id="7" name="icon-FaGraduationCap" descr="C:\Users\Thanam\AppData\Local\Temp\claude\c--Projekt-Trainings-azure-basics-training\a7a6b8eb-22f3-4b42-aecc-5af05d1502b1\scratchpad\folien\assets\icons\FaGraduationCap.png">    </p:cNvPr>
           <p:cNvPicPr>
             <a:picLocks noChangeAspect="1"/>
           </p:cNvPicPr>
@@ -4433,7 +4433,7 @@
       </p:sp>
       <p:pic>
         <p:nvPicPr>
-          <p:cNvPr id="10" name="icon-FaBook" descr="C:\Users\Thanam\AppData\Local\Temp\claude\c--Projekt-Trainings-azure-basics-training\a9e0bf4e-0d08-4082-a38a-5b8886538508\scratchpad\pptx\assets\icons\FaBook.png">    </p:cNvPr>
+          <p:cNvPr id="10" name="icon-FaBook" descr="C:\Users\Thanam\AppData\Local\Temp\claude\c--Projekt-Trainings-azure-basics-training\a7a6b8eb-22f3-4b42-aecc-5af05d1502b1\scratchpad\folien\assets\icons\FaBook.png">    </p:cNvPr>
           <p:cNvPicPr>
             <a:picLocks noChangeAspect="1"/>
           </p:cNvPicPr>
@@ -4604,7 +4604,7 @@
             <a:r>
               <a:rPr lang="en-US" sz="4000" b="1" dirty="0">
                 <a:solidFill>
-                  <a:srgbClr val="FFFFFF"/>
+                  <a:srgbClr val="27303A"/>
                 </a:solidFill>
               </a:rPr>
               <a:t>Jetzt du</a:t>
@@ -4642,7 +4642,7 @@
             <a:r>
               <a:rPr lang="en-US" sz="2000" dirty="0">
                 <a:solidFill>
-                  <a:srgbClr val="DEE2FB"/>
+                  <a:srgbClr val="006FAD"/>
                 </a:solidFill>
               </a:rPr>
               <a:t>Auftrag 4.1: Subnetting · Auftrag 4.3: Zwei VMs im VNet</a:t>
@@ -4768,7 +4768,7 @@
       </p:sp>
       <p:pic>
         <p:nvPicPr>
-          <p:cNvPr id="5" name="icon-FaBuilding" descr="C:\Users\Thanam\AppData\Local\Temp\claude\c--Projekt-Trainings-azure-basics-training\a9e0bf4e-0d08-4082-a38a-5b8886538508\scratchpad\pptx\assets\icons\FaBuilding.png">    </p:cNvPr>
+          <p:cNvPr id="5" name="icon-FaBuilding" descr="C:\Users\Thanam\AppData\Local\Temp\claude\c--Projekt-Trainings-azure-basics-training\a7a6b8eb-22f3-4b42-aecc-5af05d1502b1\scratchpad\folien\assets\icons\FaBuilding.png">    </p:cNvPr>
           <p:cNvPicPr>
             <a:picLocks noChangeAspect="1"/>
           </p:cNvPicPr>
@@ -4921,7 +4921,7 @@
       </p:sp>
       <p:pic>
         <p:nvPicPr>
-          <p:cNvPr id="10" name="icon-FaMapMarkedAlt" descr="C:\Users\Thanam\AppData\Local\Temp\claude\c--Projekt-Trainings-azure-basics-training\a9e0bf4e-0d08-4082-a38a-5b8886538508\scratchpad\pptx\assets\icons\FaMapMarkedAlt.png">    </p:cNvPr>
+          <p:cNvPr id="10" name="icon-FaMapMarkedAlt" descr="C:\Users\Thanam\AppData\Local\Temp\claude\c--Projekt-Trainings-azure-basics-training\a7a6b8eb-22f3-4b42-aecc-5af05d1502b1\scratchpad\folien\assets\icons\FaMapMarkedAlt.png">    </p:cNvPr>
           <p:cNvPicPr>
             <a:picLocks noChangeAspect="1"/>
           </p:cNvPicPr>
@@ -5074,7 +5074,7 @@
       </p:sp>
       <p:pic>
         <p:nvPicPr>
-          <p:cNvPr id="15" name="icon-FaSitemap" descr="C:\Users\Thanam\AppData\Local\Temp\claude\c--Projekt-Trainings-azure-basics-training\a9e0bf4e-0d08-4082-a38a-5b8886538508\scratchpad\pptx\assets\icons\FaSitemap.png">    </p:cNvPr>
+          <p:cNvPr id="15" name="icon-FaSitemap" descr="C:\Users\Thanam\AppData\Local\Temp\claude\c--Projekt-Trainings-azure-basics-training\a7a6b8eb-22f3-4b42-aecc-5af05d1502b1\scratchpad\folien\assets\icons\FaSitemap.png">    </p:cNvPr>
           <p:cNvPicPr>
             <a:picLocks noChangeAspect="1"/>
           </p:cNvPicPr>
@@ -7402,7 +7402,7 @@
       </p:sp>
       <p:pic>
         <p:nvPicPr>
-          <p:cNvPr id="5" name="icon-FaLock" descr="C:\Users\Thanam\AppData\Local\Temp\claude\c--Projekt-Trainings-azure-basics-training\a9e0bf4e-0d08-4082-a38a-5b8886538508\scratchpad\pptx\assets\icons\FaLock.png">    </p:cNvPr>
+          <p:cNvPr id="5" name="icon-FaLock" descr="C:\Users\Thanam\AppData\Local\Temp\claude\c--Projekt-Trainings-azure-basics-training\a7a6b8eb-22f3-4b42-aecc-5af05d1502b1\scratchpad\folien\assets\icons\FaLock.png">    </p:cNvPr>
           <p:cNvPicPr>
             <a:picLocks noChangeAspect="1"/>
           </p:cNvPicPr>
@@ -7590,7 +7590,7 @@
       </p:sp>
       <p:pic>
         <p:nvPicPr>
-          <p:cNvPr id="10" name="icon-FaGlobeEurope" descr="C:\Users\Thanam\AppData\Local\Temp\claude\c--Projekt-Trainings-azure-basics-training\a9e0bf4e-0d08-4082-a38a-5b8886538508\scratchpad\pptx\assets\icons\FaGlobeEurope.png">    </p:cNvPr>
+          <p:cNvPr id="10" name="icon-FaGlobeEurope" descr="C:\Users\Thanam\AppData\Local\Temp\claude\c--Projekt-Trainings-azure-basics-training\a7a6b8eb-22f3-4b42-aecc-5af05d1502b1\scratchpad\folien\assets\icons\FaGlobeEurope.png">    </p:cNvPr>
           <p:cNvPicPr>
             <a:picLocks noChangeAspect="1"/>
           </p:cNvPicPr>
@@ -7859,7 +7859,7 @@
             <a:r>
               <a:rPr lang="en-US" sz="4000" b="1" dirty="0">
                 <a:solidFill>
-                  <a:srgbClr val="FFFFFF"/>
+                  <a:srgbClr val="27303A"/>
                 </a:solidFill>
               </a:rPr>
               <a:t>Netzwerksicherheitsgruppen</a:t>
@@ -7897,7 +7897,7 @@
             <a:r>
               <a:rPr lang="en-US" sz="2000" dirty="0">
                 <a:solidFill>
-                  <a:srgbClr val="DEE2FB"/>
+                  <a:srgbClr val="006FAD"/>
                 </a:solidFill>
               </a:rPr>
               <a:t>Network Security Groups (NSG) · Input 2 · Tag 4</a:t>
@@ -8023,7 +8023,7 @@
       </p:sp>
       <p:pic>
         <p:nvPicPr>
-          <p:cNvPr id="5" name="icon-FaDoorOpen" descr="C:\Users\Thanam\AppData\Local\Temp\claude\c--Projekt-Trainings-azure-basics-training\a9e0bf4e-0d08-4082-a38a-5b8886538508\scratchpad\pptx\assets\icons\FaDoorOpen.png">    </p:cNvPr>
+          <p:cNvPr id="5" name="icon-FaDoorOpen" descr="C:\Users\Thanam\AppData\Local\Temp\claude\c--Projekt-Trainings-azure-basics-training\a7a6b8eb-22f3-4b42-aecc-5af05d1502b1\scratchpad\folien\assets\icons\FaDoorOpen.png">    </p:cNvPr>
           <p:cNvPicPr>
             <a:picLocks noChangeAspect="1"/>
           </p:cNvPicPr>
